--- a/DistrictPilot_AI_Hackathon.pptx
+++ b/DistrictPilot_AI_Hackathon.pptx
@@ -3213,7 +3213,7 @@
           <a:lstStyle/>
           <a:p>
             <a:pPr algn="ctr">
-              <a:defRPr sz="2800" b="0">
+              <a:defRPr sz="2400" b="0">
                 <a:solidFill>
                   <a:srgbClr val="29B6F6"/>
                 </a:solidFill>
@@ -3221,7 +3221,7 @@
               </a:defRPr>
             </a:pPr>
             <a:r>
-              <a:t>Snowflake-Native Decision Agent</a:t>
+              <a:t>Snowflake-Native Move-in Demand Orchestration Engine</a:t>
             </a:r>
           </a:p>
         </p:txBody>
@@ -3257,7 +3257,7 @@
               </a:defRPr>
             </a:pPr>
             <a:r>
-              <a:t>서초 · 영등포 · 중구  렌탈/마케팅 배분 의사결정 에이전트</a:t>
+              <a:t>서초 · 영등포 · 중구  전입·이사 기반 홈서비스 수요 오케스트레이션</a:t>
             </a:r>
           </a:p>
         </p:txBody>
@@ -4305,7 +4305,7 @@
         <p:spPr>
           <a:xfrm>
             <a:off x="457200" y="365760"/>
-            <a:ext cx="9144000" cy="548640"/>
+            <a:ext cx="9601200" cy="548640"/>
           </a:xfrm>
           <a:prstGeom prst="rect">
             <a:avLst/>
@@ -4319,7 +4319,7 @@
           <a:lstStyle/>
           <a:p>
             <a:pPr algn="l">
-              <a:defRPr sz="3600" b="1">
+              <a:defRPr sz="3400" b="1">
                 <a:solidFill>
                   <a:srgbClr val="29B6F6"/>
                 </a:solidFill>
@@ -4327,7 +4327,7 @@
               </a:defRPr>
             </a:pPr>
             <a:r>
-              <a:t>One Engine, Two Impacts</a:t>
+              <a:t>One Engine, One Operating Loop</a:t>
             </a:r>
           </a:p>
         </p:txBody>
@@ -4363,7 +4363,7 @@
               </a:defRPr>
             </a:pPr>
             <a:r>
-              <a:t>같은 Feature Mart + 같은 엔진 = 두 가지 활용</a:t>
+              <a:t>같은 엔진이 획득 전략과 운영 실행을 동시에 연결</a:t>
             </a:r>
           </a:p>
         </p:txBody>
@@ -4485,7 +4485,7 @@
               </a:defRPr>
             </a:pPr>
             <a:r>
-              <a:t>민간 (Private)</a:t>
+              <a:t>획득 전략</a:t>
             </a:r>
           </a:p>
         </p:txBody>
@@ -4524,7 +4524,7 @@
               </a:defRPr>
             </a:pPr>
             <a:r>
-              <a:t>렌탈/마케팅 예산 최적 배분</a:t>
+              <a:t>전입 직후 타깃 캠페인 우선순위</a:t>
             </a:r>
           </a:p>
           <a:p>
@@ -4540,7 +4540,7 @@
               </a:defRPr>
             </a:pPr>
             <a:r>
-              <a:t>신규 매장 출점 우선순위</a:t>
+              <a:t>구별 집행 강도와 채널 믹스</a:t>
             </a:r>
           </a:p>
           <a:p>
@@ -4556,7 +4556,7 @@
               </a:defRPr>
             </a:pPr>
             <a:r>
-              <a:t>재고/설치 인력 배치</a:t>
+              <a:t>체험 오퍼/번들 제안</a:t>
             </a:r>
           </a:p>
           <a:p>
@@ -4572,7 +4572,7 @@
               </a:defRPr>
             </a:pPr>
             <a:r>
-              <a:t>채널별 ROI 시뮬레이션</a:t>
+              <a:t>B2B/B2C 권역 공략 순서</a:t>
             </a:r>
           </a:p>
           <a:p>
@@ -4588,7 +4588,7 @@
               </a:defRPr>
             </a:pPr>
             <a:r>
-              <a:t>상품 카테고리 추천</a:t>
+              <a:t>월간 시나리오 비교</a:t>
             </a:r>
           </a:p>
         </p:txBody>
@@ -4710,7 +4710,7 @@
               </a:defRPr>
             </a:pPr>
             <a:r>
-              <a:t>공공 (Public)</a:t>
+              <a:t>운영 실행</a:t>
             </a:r>
           </a:p>
         </p:txBody>
@@ -4749,7 +4749,7 @@
               </a:defRPr>
             </a:pPr>
             <a:r>
-              <a:t>구청 상권 활성화 예산 배분</a:t>
+              <a:t>설치 가능 지역/시간대 점검</a:t>
             </a:r>
           </a:p>
           <a:p>
@@ -4765,7 +4765,7 @@
               </a:defRPr>
             </a:pPr>
             <a:r>
-              <a:t>소상공인 지원금 우선순위</a:t>
+              <a:t>현장 인력·재고 선배치</a:t>
             </a:r>
           </a:p>
           <a:p>
@@ -4781,7 +4781,7 @@
               </a:defRPr>
             </a:pPr>
             <a:r>
-              <a:t>관광 인프라 배치 근거</a:t>
+              <a:t>오피스/관광 권역 운영 제약 반영</a:t>
             </a:r>
           </a:p>
           <a:p>
@@ -4797,7 +4797,7 @@
               </a:defRPr>
             </a:pPr>
             <a:r>
-              <a:t>현장 점검 우선순위 산정</a:t>
+              <a:t>CS 에스컬레이션과 고위험 구역 관리</a:t>
             </a:r>
           </a:p>
           <a:p>
@@ -4813,7 +4813,7 @@
               </a:defRPr>
             </a:pPr>
             <a:r>
-              <a:t>생활SOC 배치 최적화</a:t>
+              <a:t>실험 예산과 후속 조정</a:t>
             </a:r>
           </a:p>
         </p:txBody>
@@ -9284,7 +9284,7 @@
           <a:lstStyle/>
           <a:p>
             <a:pPr algn="ctr">
-              <a:defRPr sz="2200" b="0">
+              <a:defRPr sz="2000" b="0">
                 <a:solidFill>
                   <a:srgbClr val="29B6F6"/>
                 </a:solidFill>
@@ -9292,7 +9292,7 @@
               </a:defRPr>
             </a:pPr>
             <a:r>
-              <a:t>DistrictPilot AI — Snowflake-Native Decision Agent</a:t>
+              <a:t>DistrictPilot AI — Snowflake-Native Move-in Demand Orchestration Engine</a:t>
             </a:r>
           </a:p>
         </p:txBody>
@@ -9497,7 +9497,7 @@
           <a:lstStyle/>
           <a:p>
             <a:pPr algn="l">
-              <a:defRPr sz="2600" b="1">
+              <a:defRPr sz="2400" b="1">
                 <a:solidFill>
                   <a:srgbClr val="FFFFFF"/>
                 </a:solidFill>
@@ -9505,11 +9505,11 @@
               </a:defRPr>
             </a:pPr>
             <a:r>
-              <a:t>"다음 달 서초·영등포·중구,</a:t>
+              <a:t>"다음 달 서초·영등포·중구 중</a:t>
             </a:r>
             <a:br/>
             <a:r>
-              <a:t>어디에 어떤 상품과 예산을 얼마나?"</a:t>
+              <a:t>어디에서 전입 직후 수요를 먼저 잡을 것인가?"</a:t>
             </a:r>
           </a:p>
         </p:txBody>
@@ -9548,7 +9548,7 @@
               </a:defRPr>
             </a:pPr>
             <a:r>
-              <a:t>기존: 경험과 감에 의존한 예산 배분</a:t>
+              <a:t>기존: 경험과 감에 의존한 지역 집행</a:t>
             </a:r>
           </a:p>
           <a:p>
@@ -9564,7 +9564,7 @@
               </a:defRPr>
             </a:pPr>
             <a:r>
-              <a:t>문제: 3개 구의 수요 변동, 인구 이동, 상권 변화를 실시간 반영 불가</a:t>
+              <a:t>문제: 전입·이사 신호와 소비 반응, 운영 제약을 같이 읽기 어려움</a:t>
             </a:r>
           </a:p>
           <a:p>
@@ -9580,7 +9580,7 @@
               </a:defRPr>
             </a:pPr>
             <a:r>
-              <a:t>결과: 과투자/미투자, ROI 측정 불가, 리스크 사각지대</a:t>
+              <a:t>결과: 타이밍 미스, 과집행/미집행, 설치·운영 리스크 누적</a:t>
             </a:r>
           </a:p>
         </p:txBody>
@@ -9698,7 +9698,7 @@
               </a:defRPr>
             </a:pPr>
             <a:r>
-              <a:t>데이터 기반 배분</a:t>
+              <a:t>전입 신호 감지</a:t>
             </a:r>
           </a:p>
           <a:p>
@@ -9714,7 +9714,7 @@
               </a:defRPr>
             </a:pPr>
             <a:r>
-              <a:t>AI 근거 제시</a:t>
+              <a:t>수요 근거 제시</a:t>
             </a:r>
           </a:p>
           <a:p>
@@ -9746,7 +9746,7 @@
               </a:defRPr>
             </a:pPr>
             <a:r>
-              <a:t>민간 + 공공 듀얼</a:t>
+              <a:t>운영 액션 연결</a:t>
             </a:r>
           </a:p>
         </p:txBody>
@@ -10176,7 +10176,7 @@
                         </a:defRPr>
                       </a:pPr>
                       <a:r>
-                        <a:t>통신 가입 / 렌탈 / 마케팅 / CS</a:t>
+                        <a:t>렌탈 / 통신 / 마케팅 / CS</a:t>
                       </a:r>
                     </a:p>
                   </a:txBody>
@@ -10223,8 +10223,8 @@
         </p:nvSpPr>
         <p:spPr>
           <a:xfrm>
-            <a:off x="457200" y="3474720"/>
-            <a:ext cx="5486400" cy="457200"/>
+            <a:off x="6400800" y="1645920"/>
+            <a:ext cx="4937760" cy="548640"/>
           </a:xfrm>
           <a:prstGeom prst="rect">
             <a:avLst/>
@@ -10238,6 +10238,42 @@
           <a:lstStyle/>
           <a:p>
             <a:pPr algn="l">
+              <a:defRPr sz="1800" b="0">
+                <a:solidFill>
+                  <a:srgbClr val="FF9F43"/>
+                </a:solidFill>
+                <a:latin typeface="Calibri"/>
+              </a:defRPr>
+            </a:pPr>
+            <a:r>
+              <a:t>전입 신호 + 소비 반응 + 운영 액션을 한 문제로 묶는 구조</a:t>
+            </a:r>
+          </a:p>
+        </p:txBody>
+      </p:sp>
+      <p:sp>
+        <p:nvSpPr>
+          <p:cNvPr id="7" name="TextBox 6"/>
+          <p:cNvSpPr txBox="1"/>
+          <p:nvPr/>
+        </p:nvSpPr>
+        <p:spPr>
+          <a:xfrm>
+            <a:off x="457200" y="3474720"/>
+            <a:ext cx="5486400" cy="457200"/>
+          </a:xfrm>
+          <a:prstGeom prst="rect">
+            <a:avLst/>
+          </a:prstGeom>
+          <a:noFill/>
+        </p:spPr>
+        <p:txBody>
+          <a:bodyPr wrap="square">
+            <a:spAutoFit/>
+          </a:bodyPr>
+          <a:lstStyle/>
+          <a:p>
+            <a:pPr algn="l">
               <a:defRPr sz="2000" b="1">
                 <a:solidFill>
                   <a:srgbClr val="FFFFFF"/>
@@ -10253,7 +10289,7 @@
       </p:sp>
       <p:graphicFrame>
         <p:nvGraphicFramePr>
-          <p:cNvPr id="7" name="Table 6"/>
+          <p:cNvPr id="8" name="Table 7"/>
           <p:cNvGraphicFramePr>
             <a:graphicFrameLocks noGrp="1"/>
           </p:cNvGraphicFramePr>
@@ -11380,7 +11416,7 @@
               </a:defRPr>
             </a:pPr>
             <a:r>
-              <a:t>AI_COMPLETE Structured Output → Action Cards</a:t>
+              <a:t>AI_COMPLETE Structured Output -&gt; Capture Plan + Operator Actions</a:t>
             </a:r>
           </a:p>
         </p:txBody>
@@ -11538,7 +11574,7 @@
               </a:defRPr>
             </a:pPr>
             <a:r>
-              <a:t>Streamlit in Snowflake (5 tabs: Allocation | Analysis | AI | Simulation | Ops)</a:t>
+              <a:t>Streamlit in Snowflake (Capture Plan | Signals | AI | Scenario | Ops)</a:t>
             </a:r>
           </a:p>
         </p:txBody>
@@ -13448,7 +13484,7 @@
               </a:defRPr>
             </a:pPr>
             <a:r>
-              <a:t>Streamlit — Allocation</a:t>
+              <a:t>Streamlit — Capture Plan</a:t>
             </a:r>
           </a:p>
         </p:txBody>
@@ -14110,7 +14146,7 @@
         <p:spPr>
           <a:xfrm>
             <a:off x="457200" y="365760"/>
-            <a:ext cx="9144000" cy="548640"/>
+            <a:ext cx="9601200" cy="548640"/>
           </a:xfrm>
           <a:prstGeom prst="rect">
             <a:avLst/>
@@ -14124,7 +14160,7 @@
           <a:lstStyle/>
           <a:p>
             <a:pPr algn="l">
-              <a:defRPr sz="3600" b="1">
+              <a:defRPr sz="3400" b="1">
                 <a:solidFill>
                   <a:srgbClr val="29B6F6"/>
                 </a:solidFill>
@@ -14132,7 +14168,7 @@
               </a:defRPr>
             </a:pPr>
             <a:r>
-              <a:t>Streamlit — Analysis + AI Agent</a:t>
+              <a:t>Streamlit — Move-in Signals + AI Playbook</a:t>
             </a:r>
           </a:p>
         </p:txBody>
@@ -14211,7 +14247,7 @@
               </a:defRPr>
             </a:pPr>
             <a:r>
-              <a:t>Analysis Tab</a:t>
+              <a:t>Move-in Signals Tab</a:t>
             </a:r>
           </a:p>
         </p:txBody>
@@ -14250,7 +14286,7 @@
               </a:defRPr>
             </a:pPr>
             <a:r>
-              <a:t>KPI: 유동인구 / 카드소비 / 순이동 / 자산</a:t>
+              <a:t>KPI: 전입 세대 / 순이동 / 카드소비 / 자산</a:t>
             </a:r>
           </a:p>
           <a:p>
@@ -14409,7 +14445,7 @@
               </a:defRPr>
             </a:pPr>
             <a:r>
-              <a:t>AI Agent Tab</a:t>
+              <a:t>AI Playbook Tab</a:t>
             </a:r>
           </a:p>
         </p:txBody>
@@ -14516,7 +14552,7 @@
               </a:defRPr>
             </a:pPr>
             <a:r>
-              <a:t>  "drivers": ["순이동 증가", "카드소비 강세"]</a:t>
+              <a:t>  "drivers": ["전입 증가", "카드소비 강세"]</a:t>
             </a:r>
           </a:p>
           <a:p>
@@ -14548,7 +14584,7 @@
               </a:defRPr>
             </a:pPr>
             <a:r>
-              <a:t>  "next_action": "가전 예산 15% 증액"</a:t>
+              <a:t>  "next_action": "설치 인력과 체험 오퍼 우선 배치"</a:t>
             </a:r>
           </a:p>
         </p:txBody>
